--- a/Presentations/Ns-3_presentation_F.pptx
+++ b/Presentations/Ns-3_presentation_F.pptx
@@ -223,7 +223,7 @@
             <a:pPr rtl="0"/>
             <a:fld id="{F0EC7D35-77BB-4867-BAC6-5C40C37B98F1}" type="datetime1">
               <a:rPr lang="el-GR" smtClean="0"/>
-              <a:t>21/11/2025</a:t>
+              <a:t>23/11/2025</a:t>
             </a:fld>
             <a:endParaRPr lang="el-GR" dirty="0"/>
           </a:p>
@@ -393,7 +393,7 @@
             <a:pPr rtl="0"/>
             <a:fld id="{707ABAE7-72BE-4378-9C66-B300388DE536}" type="datetime1">
               <a:rPr lang="el-GR" noProof="0" smtClean="0"/>
-              <a:t>21/11/2025</a:t>
+              <a:t>23/11/2025</a:t>
             </a:fld>
             <a:endParaRPr lang="el-GR" noProof="0" dirty="0"/>
           </a:p>
@@ -9659,7 +9659,7 @@
             <a:pPr rtl="0"/>
             <a:fld id="{EABDBA74-E4DB-4313-95D3-B7F630EE7B7F}" type="datetime1">
               <a:rPr lang="el-GR" noProof="0" smtClean="0"/>
-              <a:t>21/11/2025</a:t>
+              <a:t>23/11/2025</a:t>
             </a:fld>
             <a:endParaRPr lang="el-GR" noProof="0" dirty="0"/>
           </a:p>
@@ -9868,7 +9868,7 @@
             <a:pPr rtl="0"/>
             <a:fld id="{D9C97E28-F60A-427B-851A-BCC048F06BC7}" type="datetime1">
               <a:rPr lang="el-GR" noProof="0" smtClean="0"/>
-              <a:t>21/11/2025</a:t>
+              <a:t>23/11/2025</a:t>
             </a:fld>
             <a:endParaRPr lang="el-GR" noProof="0" dirty="0"/>
           </a:p>
@@ -10050,7 +10050,7 @@
             <a:pPr rtl="0"/>
             <a:fld id="{4EA33EDB-81C3-4DAA-87EA-DA21D6A7FC6C}" type="datetime1">
               <a:rPr lang="el-GR" noProof="0" smtClean="0"/>
-              <a:t>21/11/2025</a:t>
+              <a:t>23/11/2025</a:t>
             </a:fld>
             <a:endParaRPr lang="el-GR" noProof="0" dirty="0"/>
           </a:p>
@@ -10257,7 +10257,7 @@
             <a:pPr rtl="0"/>
             <a:fld id="{0FE5ACA5-56F5-4208-8101-108DA68822C6}" type="datetime1">
               <a:rPr lang="el-GR" noProof="0" smtClean="0"/>
-              <a:t>21/11/2025</a:t>
+              <a:t>23/11/2025</a:t>
             </a:fld>
             <a:endParaRPr lang="el-GR" noProof="0" dirty="0"/>
           </a:p>
@@ -19171,7 +19171,7 @@
             <a:pPr rtl="0"/>
             <a:fld id="{98AAE694-814A-4F58-A8E2-AA9B6575E0B5}" type="datetime1">
               <a:rPr lang="el-GR" noProof="0" smtClean="0"/>
-              <a:t>21/11/2025</a:t>
+              <a:t>23/11/2025</a:t>
             </a:fld>
             <a:endParaRPr lang="el-GR" noProof="0" dirty="0"/>
           </a:p>
@@ -19447,7 +19447,7 @@
             <a:pPr rtl="0"/>
             <a:fld id="{98B30D4A-F623-45A5-BE49-543B4B609AF2}" type="datetime1">
               <a:rPr lang="el-GR" noProof="0" smtClean="0"/>
-              <a:t>21/11/2025</a:t>
+              <a:t>23/11/2025</a:t>
             </a:fld>
             <a:endParaRPr lang="el-GR" noProof="0" dirty="0"/>
           </a:p>
@@ -19847,7 +19847,7 @@
             <a:pPr rtl="0"/>
             <a:fld id="{06412F62-D18F-463A-9A7E-E4809AAD76E4}" type="datetime1">
               <a:rPr lang="el-GR" noProof="0" smtClean="0"/>
-              <a:t>21/11/2025</a:t>
+              <a:t>23/11/2025</a:t>
             </a:fld>
             <a:endParaRPr lang="el-GR" noProof="0" dirty="0"/>
           </a:p>
@@ -19967,7 +19967,7 @@
             <a:pPr rtl="0"/>
             <a:fld id="{D2009D47-CF8A-48CB-81B8-5988DBFADA28}" type="datetime1">
               <a:rPr lang="el-GR" noProof="0" smtClean="0"/>
-              <a:t>21/11/2025</a:t>
+              <a:t>23/11/2025</a:t>
             </a:fld>
             <a:endParaRPr lang="el-GR" noProof="0" dirty="0"/>
           </a:p>
@@ -20063,7 +20063,7 @@
             <a:pPr rtl="0"/>
             <a:fld id="{89B075A6-4B0E-489A-92E5-C2C81D969D11}" type="datetime1">
               <a:rPr lang="el-GR" noProof="0" smtClean="0"/>
-              <a:t>21/11/2025</a:t>
+              <a:t>23/11/2025</a:t>
             </a:fld>
             <a:endParaRPr lang="el-GR" noProof="0" dirty="0"/>
           </a:p>
@@ -20355,7 +20355,7 @@
             <a:pPr rtl="0"/>
             <a:fld id="{7C290451-C354-46E0-BBD8-0317D7A1384C}" type="datetime1">
               <a:rPr lang="el-GR" noProof="0" smtClean="0"/>
-              <a:t>21/11/2025</a:t>
+              <a:t>23/11/2025</a:t>
             </a:fld>
             <a:endParaRPr lang="el-GR" noProof="0" dirty="0"/>
           </a:p>
@@ -20637,7 +20637,7 @@
             <a:pPr rtl="0"/>
             <a:fld id="{05DAA40D-D363-46A0-9276-B6A4797DC9A5}" type="datetime1">
               <a:rPr lang="el-GR" noProof="0" smtClean="0"/>
-              <a:t>21/11/2025</a:t>
+              <a:t>23/11/2025</a:t>
             </a:fld>
             <a:endParaRPr lang="el-GR" noProof="0" dirty="0"/>
           </a:p>
@@ -20886,7 +20886,7 @@
           <a:p>
             <a:fld id="{F98FDC76-A1F5-4EE8-BDE3-5EFC56AAE7AD}" type="datetime1">
               <a:rPr lang="el-GR" noProof="0" smtClean="0"/>
-              <a:t>21/11/2025</a:t>
+              <a:t>23/11/2025</a:t>
             </a:fld>
             <a:endParaRPr lang="el-GR" noProof="0" dirty="0"/>
           </a:p>
@@ -22606,8 +22606,8 @@
         </p:nvSpPr>
         <p:spPr>
           <a:xfrm>
-            <a:off x="1024126" y="2286000"/>
-            <a:ext cx="9911352" cy="2416629"/>
+            <a:off x="1024125" y="2286000"/>
+            <a:ext cx="9984533" cy="3881718"/>
           </a:xfrm>
         </p:spPr>
         <p:txBody>
@@ -22638,7 +22638,7 @@
             </a:r>
             <a:r>
               <a:rPr lang="el-GR" dirty="0"/>
-              <a:t> καθώς το </a:t>
+              <a:t>.Το </a:t>
             </a:r>
             <a:r>
               <a:rPr lang="en-GB" dirty="0"/>
@@ -22669,23 +22669,50 @@
             </a:pPr>
             <a:r>
               <a:rPr lang="el-GR" dirty="0"/>
-              <a:t>Βέβαια, με την χρήση του </a:t>
+              <a:t>Βέβαια, το AODV είναι </a:t>
+            </a:r>
+            <a:r>
+              <a:rPr lang="el-GR" dirty="0" err="1"/>
+              <a:t>reactive</a:t>
+            </a:r>
+            <a:r>
+              <a:rPr lang="el-GR" dirty="0"/>
+              <a:t> πρωτόκολλο, δηλαδή δημιουργεί διαδρομές μόνο όταν χρειάζονται. Έτσι, στην αρχή υπάρχει μια καθυστέρηση μέχρι να βρεθούν οι διαδρομές μεταξύ των κόμβων. </a:t>
+            </a:r>
+            <a:endParaRPr lang="en-US" dirty="0"/>
+          </a:p>
+          <a:p>
+            <a:pPr algn="just">
+              <a:buFont typeface="Arial" panose="020B0604020202020204" pitchFamily="34" charset="0"/>
+              <a:buChar char="•"/>
+            </a:pPr>
+            <a:r>
+              <a:rPr lang="el-GR" dirty="0"/>
+              <a:t>Το </a:t>
+            </a:r>
+            <a:r>
+              <a:rPr lang="el-GR" dirty="0" err="1"/>
+              <a:t>warm-up</a:t>
+            </a:r>
+            <a:r>
+              <a:rPr lang="el-GR" dirty="0"/>
+              <a:t> </a:t>
+            </a:r>
+            <a:r>
+              <a:rPr lang="el-GR" dirty="0" err="1"/>
+              <a:t>phase</a:t>
+            </a:r>
+            <a:r>
+              <a:rPr lang="el-GR" dirty="0"/>
+              <a:t> βοηθά ώστε αυτές οι διαδρομές να έχουν ήδη δημιουργηθεί πριν ξεκινήσουν οι μετρήσεις. Έτσι έχουμε πιο σταθερά και πιο αξιόπιστα αποτελέσματα με την χρήση του </a:t>
             </a:r>
             <a:r>
               <a:rPr lang="en-US" altLang="el-GR" dirty="0"/>
-              <a:t>AODVN </a:t>
+              <a:t>AODVN</a:t>
             </a:r>
             <a:r>
               <a:rPr lang="el-GR" altLang="el-GR" dirty="0"/>
-              <a:t>τα αποτελέσματα αλλάζουν δραματικά και φαίνεται πράγματι το </a:t>
-            </a:r>
-            <a:r>
-              <a:rPr lang="en-US" altLang="el-GR" dirty="0"/>
-              <a:t>warm-up phase </a:t>
-            </a:r>
-            <a:r>
-              <a:rPr lang="el-GR" altLang="el-GR" dirty="0"/>
-              <a:t>σε δράση.</a:t>
+              <a:t>.</a:t>
             </a:r>
             <a:endParaRPr lang="en-US" dirty="0"/>
           </a:p>
@@ -27791,14 +27818,6 @@
 </file>
 
 <file path=customXml/item2.xml><?xml version="1.0" encoding="utf-8"?>
-<p:properties xmlns:p="http://schemas.microsoft.com/office/2006/metadata/properties" xmlns:xsi="http://www.w3.org/2001/XMLSchema-instance" xmlns:pc="http://schemas.microsoft.com/office/infopath/2007/PartnerControls">
-  <documentManagement>
-    <MediaServiceKeyPoints xmlns="71af3243-3dd4-4a8d-8c0d-dd76da1f02a5" xsi:nil="true"/>
-  </documentManagement>
-</p:properties>
-</file>
-
-<file path=customXml/item3.xml><?xml version="1.0" encoding="utf-8"?>
 <ct:contentTypeSchema xmlns:ct="http://schemas.microsoft.com/office/2006/metadata/contentType" xmlns:ma="http://schemas.microsoft.com/office/2006/metadata/properties/metaAttributes" ct:_="" ma:_="" ma:contentTypeName="Document" ma:contentTypeID="0x01010079F111ED35F8CC479449609E8A0923A6" ma:contentTypeVersion="11" ma:contentTypeDescription="Create a new document." ma:contentTypeScope="" ma:versionID="9677210f24a1be23c92c90fd886aa0aa">
   <xsd:schema xmlns:xsd="http://www.w3.org/2001/XMLSchema" xmlns:xs="http://www.w3.org/2001/XMLSchema" xmlns:p="http://schemas.microsoft.com/office/2006/metadata/properties" xmlns:ns2="71af3243-3dd4-4a8d-8c0d-dd76da1f02a5" xmlns:ns3="16c05727-aa75-4e4a-9b5f-8a80a1165891" targetNamespace="http://schemas.microsoft.com/office/2006/metadata/properties" ma:root="true" ma:fieldsID="60e05723c5c1908df1a1a4ebf11d344e" ns2:_="" ns3:_="">
     <xsd:import namespace="71af3243-3dd4-4a8d-8c0d-dd76da1f02a5"/>
@@ -28009,6 +28028,14 @@
 </ct:contentTypeSchema>
 </file>
 
+<file path=customXml/item3.xml><?xml version="1.0" encoding="utf-8"?>
+<p:properties xmlns:p="http://schemas.microsoft.com/office/2006/metadata/properties" xmlns:xsi="http://www.w3.org/2001/XMLSchema-instance" xmlns:pc="http://schemas.microsoft.com/office/infopath/2007/PartnerControls">
+  <documentManagement>
+    <MediaServiceKeyPoints xmlns="71af3243-3dd4-4a8d-8c0d-dd76da1f02a5" xsi:nil="true"/>
+  </documentManagement>
+</p:properties>
+</file>
+
 <file path=customXml/itemProps1.xml><?xml version="1.0" encoding="utf-8"?>
 <ds:datastoreItem xmlns:ds="http://schemas.openxmlformats.org/officeDocument/2006/customXml" ds:itemID="{4F44C90D-2A62-4985-9618-3460247437B1}">
   <ds:schemaRefs>
@@ -28018,23 +28045,6 @@
 </file>
 
 <file path=customXml/itemProps2.xml><?xml version="1.0" encoding="utf-8"?>
-<ds:datastoreItem xmlns:ds="http://schemas.openxmlformats.org/officeDocument/2006/customXml" ds:itemID="{788A2F88-55C5-4ED1-9541-807C65424763}">
-  <ds:schemaRefs>
-    <ds:schemaRef ds:uri="16c05727-aa75-4e4a-9b5f-8a80a1165891"/>
-    <ds:schemaRef ds:uri="http://purl.org/dc/elements/1.1/"/>
-    <ds:schemaRef ds:uri="http://www.w3.org/XML/1998/namespace"/>
-    <ds:schemaRef ds:uri="http://purl.org/dc/terms/"/>
-    <ds:schemaRef ds:uri="http://purl.org/dc/dcmitype/"/>
-    <ds:schemaRef ds:uri="http://schemas.microsoft.com/office/infopath/2007/PartnerControls"/>
-    <ds:schemaRef ds:uri="http://schemas.microsoft.com/office/2006/documentManagement/types"/>
-    <ds:schemaRef ds:uri="http://schemas.openxmlformats.org/package/2006/metadata/core-properties"/>
-    <ds:schemaRef ds:uri="71af3243-3dd4-4a8d-8c0d-dd76da1f02a5"/>
-    <ds:schemaRef ds:uri="http://schemas.microsoft.com/office/2006/metadata/properties"/>
-  </ds:schemaRefs>
-</ds:datastoreItem>
-</file>
-
-<file path=customXml/itemProps3.xml><?xml version="1.0" encoding="utf-8"?>
 <ds:datastoreItem xmlns:ds="http://schemas.openxmlformats.org/officeDocument/2006/customXml" ds:itemID="{B61EAB5F-88FC-4FAE-AE3C-037A3C365EB8}">
   <ds:schemaRefs>
     <ds:schemaRef ds:uri="http://schemas.microsoft.com/office/2006/metadata/contentType"/>
@@ -28051,4 +28061,21 @@
     <ds:schemaRef ds:uri="http://schemas.microsoft.com/internal/obd"/>
   </ds:schemaRefs>
 </ds:datastoreItem>
+</file>
+
+<file path=customXml/itemProps3.xml><?xml version="1.0" encoding="utf-8"?>
+<ds:datastoreItem xmlns:ds="http://schemas.openxmlformats.org/officeDocument/2006/customXml" ds:itemID="{788A2F88-55C5-4ED1-9541-807C65424763}">
+  <ds:schemaRefs>
+    <ds:schemaRef ds:uri="http://schemas.microsoft.com/office/2006/documentManagement/types"/>
+    <ds:schemaRef ds:uri="http://schemas.microsoft.com/office/2006/metadata/properties"/>
+    <ds:schemaRef ds:uri="http://purl.org/dc/elements/1.1/"/>
+    <ds:schemaRef ds:uri="http://www.w3.org/XML/1998/namespace"/>
+    <ds:schemaRef ds:uri="16c05727-aa75-4e4a-9b5f-8a80a1165891"/>
+    <ds:schemaRef ds:uri="http://purl.org/dc/dcmitype/"/>
+    <ds:schemaRef ds:uri="71af3243-3dd4-4a8d-8c0d-dd76da1f02a5"/>
+    <ds:schemaRef ds:uri="http://schemas.microsoft.com/office/infopath/2007/PartnerControls"/>
+    <ds:schemaRef ds:uri="http://schemas.openxmlformats.org/package/2006/metadata/core-properties"/>
+    <ds:schemaRef ds:uri="http://purl.org/dc/terms/"/>
+  </ds:schemaRefs>
+</ds:datastoreItem>
 </file>
--- a/Presentations/Ns-3_presentation_F.pptx
+++ b/Presentations/Ns-3_presentation_F.pptx
@@ -21808,7 +21808,7 @@
         <p:spPr>
           <a:xfrm>
             <a:off x="5181600" y="2232599"/>
-            <a:ext cx="5522259" cy="3851037"/>
+            <a:ext cx="5711687" cy="3851037"/>
           </a:xfrm>
         </p:spPr>
         <p:txBody>
@@ -21824,15 +21824,7 @@
             </a:r>
             <a:r>
               <a:rPr lang="en-US" sz="2100" dirty="0"/>
-              <a:t>delay = 5 </a:t>
-            </a:r>
-            <a:r>
-              <a:rPr lang="en-US" sz="2100" dirty="0" err="1"/>
-              <a:t>ms</a:t>
-            </a:r>
-            <a:r>
-              <a:rPr lang="en-US" sz="2100" dirty="0"/>
-              <a:t> </a:t>
+              <a:t>delay = 5ms </a:t>
             </a:r>
             <a:r>
               <a:rPr lang="el-GR" sz="2100" dirty="0"/>
@@ -21851,12 +21843,8 @@
               <a:t>double </a:t>
             </a:r>
             <a:r>
-              <a:rPr lang="en-US" sz="2100" b="1" dirty="0" err="1"/>
-              <a:t>failDownAt</a:t>
-            </a:r>
-            <a:r>
               <a:rPr lang="en-US" sz="2100" b="1" dirty="0"/>
-              <a:t> = </a:t>
+              <a:t>failDownAt = </a:t>
             </a:r>
             <a:r>
               <a:rPr lang="el-GR" sz="2100" b="1" dirty="0"/>
@@ -21864,7 +21852,7 @@
             </a:r>
             <a:r>
               <a:rPr lang="en-US" sz="2100" b="1" dirty="0"/>
-              <a:t>.0 s</a:t>
+              <a:t>.0s</a:t>
             </a:r>
             <a:r>
               <a:rPr lang="en-US" sz="2100" dirty="0"/>
@@ -21872,19 +21860,11 @@
             </a:r>
             <a:r>
               <a:rPr lang="en-US" sz="2100" b="1" dirty="0"/>
-              <a:t>double </a:t>
-            </a:r>
-            <a:r>
-              <a:rPr lang="en-US" sz="2100" b="1" dirty="0" err="1"/>
-              <a:t>failUpAt</a:t>
-            </a:r>
-            <a:r>
-              <a:rPr lang="en-US" sz="2100" b="1" dirty="0"/>
-              <a:t> = 3.0 s</a:t>
+              <a:t>double failUpAt = 3.0 s</a:t>
             </a:r>
             <a:r>
               <a:rPr lang="en-US" sz="2100" dirty="0"/>
-              <a:t>,</a:t>
+              <a:t>, </a:t>
             </a:r>
             <a:r>
               <a:rPr lang="el-GR" sz="2100" dirty="0"/>
@@ -22166,7 +22146,7 @@
         </p:blipFill>
         <p:spPr>
           <a:xfrm>
-            <a:off x="784879" y="1861061"/>
+            <a:off x="959808" y="1861061"/>
             <a:ext cx="3499596" cy="3686834"/>
           </a:xfrm>
           <a:prstGeom prst="rect">
@@ -22220,7 +22200,7 @@
         </p:nvSpPr>
         <p:spPr>
           <a:xfrm>
-            <a:off x="6442216" y="5667227"/>
+            <a:off x="6654591" y="5661067"/>
             <a:ext cx="4763666" cy="923330"/>
           </a:xfrm>
           <a:prstGeom prst="rect">
@@ -22293,7 +22273,7 @@
         </p:nvSpPr>
         <p:spPr>
           <a:xfrm>
-            <a:off x="546847" y="5672619"/>
+            <a:off x="293617" y="5661198"/>
             <a:ext cx="4831977" cy="923330"/>
           </a:xfrm>
           <a:prstGeom prst="rect">
@@ -22607,7 +22587,7 @@
         <p:spPr>
           <a:xfrm>
             <a:off x="1024125" y="2286000"/>
-            <a:ext cx="9984533" cy="3881718"/>
+            <a:ext cx="9463645" cy="3881718"/>
           </a:xfrm>
         </p:spPr>
         <p:txBody>
@@ -22669,15 +22649,7 @@
             </a:pPr>
             <a:r>
               <a:rPr lang="el-GR" dirty="0"/>
-              <a:t>Βέβαια, το AODV είναι </a:t>
-            </a:r>
-            <a:r>
-              <a:rPr lang="el-GR" dirty="0" err="1"/>
-              <a:t>reactive</a:t>
-            </a:r>
-            <a:r>
-              <a:rPr lang="el-GR" dirty="0"/>
-              <a:t> πρωτόκολλο, δηλαδή δημιουργεί διαδρομές μόνο όταν χρειάζονται. Έτσι, στην αρχή υπάρχει μια καθυστέρηση μέχρι να βρεθούν οι διαδρομές μεταξύ των κόμβων. </a:t>
+              <a:t>Βέβαια, το AODV είναι reactive πρωτόκολλο, δηλαδή δημιουργεί διαδρομές μόνο όταν χρειάζονται. Έτσι, στην αρχή υπάρχει μια καθυστέρηση μέχρι να βρεθούν οι διαδρομές μεταξύ των κόμβων. </a:t>
             </a:r>
             <a:endParaRPr lang="en-US" dirty="0"/>
           </a:p>
@@ -22688,23 +22660,15 @@
             </a:pPr>
             <a:r>
               <a:rPr lang="el-GR" dirty="0"/>
-              <a:t>Το </a:t>
-            </a:r>
-            <a:r>
-              <a:rPr lang="el-GR" dirty="0" err="1"/>
-              <a:t>warm-up</a:t>
+              <a:t>Το warm-up phase βοηθά ώστε αυτές οι διαδρομές να έχουν ήδη δημιουργηθεί πριν ξεκινήσουν οι μετρήσεις.</a:t>
+            </a:r>
+            <a:r>
+              <a:rPr lang="en-US" dirty="0"/>
+              <a:t> </a:t>
             </a:r>
             <a:r>
               <a:rPr lang="el-GR" dirty="0"/>
-              <a:t> </a:t>
-            </a:r>
-            <a:r>
-              <a:rPr lang="el-GR" dirty="0" err="1"/>
-              <a:t>phase</a:t>
-            </a:r>
-            <a:r>
-              <a:rPr lang="el-GR" dirty="0"/>
-              <a:t> βοηθά ώστε αυτές οι διαδρομές να έχουν ήδη δημιουργηθεί πριν ξεκινήσουν οι μετρήσεις. Έτσι έχουμε πιο σταθερά και πιο αξιόπιστα αποτελέσματα με την χρήση του </a:t>
+              <a:t>Με αποτέλεσμα, να έχουμε πιο σταθερά και αξιόπιστα αποτελέσματα με την χρήση του </a:t>
             </a:r>
             <a:r>
               <a:rPr lang="en-US" altLang="el-GR" dirty="0"/>
@@ -23499,7 +23463,7 @@
                 <a:ea typeface="Calibri" panose="020F0502020204030204" pitchFamily="34" charset="0"/>
                 <a:cs typeface="Calibri" panose="020F0502020204030204" pitchFamily="34" charset="0"/>
               </a:rPr>
-              <a:t>Αντίστοιχα από δεξιά</a:t>
+              <a:t>Αντίστοιχα δεξιά</a:t>
             </a:r>
             <a:r>
               <a:rPr lang="en-US" dirty="0">
@@ -24774,7 +24738,7 @@
               <a:t></a:t>
             </a:r>
             <a:r>
-              <a:rPr lang="el-GR" dirty="0">
+              <a:rPr lang="el-GR" sz="2000" b="1" dirty="0">
                 <a:solidFill>
                   <a:schemeClr val="accent1">
                     <a:lumMod val="75000"/>
@@ -24784,6 +24748,16 @@
               <a:t>Προσομοίωση δικτύου με την χρήση του </a:t>
             </a:r>
             <a:r>
+              <a:rPr lang="en-US" sz="2000" b="1" dirty="0">
+                <a:solidFill>
+                  <a:schemeClr val="accent1">
+                    <a:lumMod val="75000"/>
+                  </a:schemeClr>
+                </a:solidFill>
+              </a:rPr>
+              <a:t>simulator NS-3</a:t>
+            </a:r>
+            <a:r>
               <a:rPr lang="en-US" dirty="0">
                 <a:solidFill>
                   <a:schemeClr val="accent1">
@@ -24791,7 +24765,7 @@
                   </a:schemeClr>
                 </a:solidFill>
               </a:rPr>
-              <a:t>simulator NS-3.</a:t>
+              <a:t>.</a:t>
             </a:r>
             <a:endParaRPr lang="el-GR" dirty="0">
               <a:solidFill>
@@ -24850,37 +24824,33 @@
               <a:buNone/>
             </a:pPr>
             <a:r>
-              <a:rPr lang="en-US" dirty="0">
+              <a:rPr lang="el-GR" sz="2200" dirty="0">
                 <a:solidFill>
                   <a:schemeClr val="accent1">
                     <a:lumMod val="75000"/>
                   </a:schemeClr>
                 </a:solidFill>
               </a:rPr>
-              <a:t>1)</a:t>
-            </a:r>
-            <a:r>
-              <a:rPr lang="en-US" dirty="0"/>
-              <a:t> </a:t>
-            </a:r>
-            <a:r>
-              <a:rPr lang="el-GR" dirty="0"/>
+              <a:t>1) </a:t>
+            </a:r>
+            <a:r>
+              <a:rPr lang="el-GR" sz="2200" dirty="0"/>
               <a:t>Προσομοίωση μιας απλής σύνδεσης σημείου-προς-σημείο μεταξύ δύο κόμβων,  με προϋπόθεση η  μετάδοση να γίνει με την τεχνική του </a:t>
             </a:r>
             <a:r>
-              <a:rPr lang="en-US" dirty="0"/>
+              <a:rPr lang="en-US" sz="2200" dirty="0"/>
               <a:t>UDP-echo (</a:t>
             </a:r>
             <a:r>
-              <a:rPr lang="el-GR" dirty="0"/>
+              <a:rPr lang="el-GR" sz="2200" dirty="0"/>
               <a:t>«</a:t>
             </a:r>
             <a:r>
-              <a:rPr lang="en-GB" dirty="0"/>
+              <a:rPr lang="en-GB" sz="2200" dirty="0"/>
               <a:t>a process for testing network connectivity and measuring response time by sending a UDP packet to a </a:t>
             </a:r>
             <a:r>
-              <a:rPr lang="en-GB" dirty="0">
+              <a:rPr lang="en-GB" sz="2200" dirty="0">
                 <a:solidFill>
                   <a:schemeClr val="accent1">
                     <a:lumMod val="75000"/>
@@ -24890,20 +24860,27 @@
               <a:t>destination</a:t>
             </a:r>
             <a:r>
-              <a:rPr lang="en-GB" dirty="0"/>
+              <a:rPr lang="en-GB" sz="2200" dirty="0"/>
               <a:t> and waiting for the destination to send it back</a:t>
             </a:r>
             <a:r>
-              <a:rPr lang="el-GR" dirty="0"/>
+              <a:rPr lang="el-GR" sz="2200" dirty="0"/>
               <a:t>» ).</a:t>
             </a:r>
+            <a:endParaRPr lang="en-US" sz="2200" dirty="0"/>
           </a:p>
           <a:p>
             <a:pPr marL="173736" lvl="1" indent="0" algn="just">
               <a:buNone/>
             </a:pPr>
-            <a:r>
-              <a:rPr lang="el-GR" dirty="0">
+            <a:endParaRPr lang="el-GR" sz="2200" dirty="0"/>
+          </a:p>
+          <a:p>
+            <a:pPr marL="173736" lvl="1" indent="0" algn="just">
+              <a:buNone/>
+            </a:pPr>
+            <a:r>
+              <a:rPr lang="el-GR" sz="2200" dirty="0">
                 <a:solidFill>
                   <a:schemeClr val="accent1">
                     <a:lumMod val="75000"/>
@@ -24913,7 +24890,7 @@
               <a:t>2) </a:t>
             </a:r>
             <a:r>
-              <a:rPr lang="el-GR" dirty="0"/>
+              <a:rPr lang="el-GR" sz="2200" dirty="0"/>
               <a:t>Προσομοίωση ενός πιο πολύπλοκου δικτύου με δυναμική δρομολόγηση, δημιουργία ροών πακέτων, εισαγωγή αποτυχίας συνδέσεων και ανάλυση απώλειας πακέτων.</a:t>
             </a:r>
           </a:p>
@@ -25377,7 +25354,7 @@
           </a:bodyPr>
           <a:lstStyle/>
           <a:p>
-            <a:pPr algn="just">
+            <a:pPr>
               <a:buFont typeface="Arial" panose="020B0604020202020204" pitchFamily="34" charset="0"/>
               <a:buChar char="•"/>
             </a:pPr>
@@ -25399,7 +25376,7 @@
             </a:r>
           </a:p>
           <a:p>
-            <a:pPr algn="just">
+            <a:pPr>
               <a:buFont typeface="Arial" panose="020B0604020202020204" pitchFamily="34" charset="0"/>
               <a:buChar char="•"/>
             </a:pPr>
@@ -25425,7 +25402,7 @@
             </a:r>
           </a:p>
           <a:p>
-            <a:pPr algn="just">
+            <a:pPr>
               <a:buFont typeface="Arial" panose="020B0604020202020204" pitchFamily="34" charset="0"/>
               <a:buChar char="•"/>
             </a:pPr>
@@ -25460,7 +25437,7 @@
             <a:endParaRPr lang="en-US" dirty="0"/>
           </a:p>
           <a:p>
-            <a:pPr algn="just">
+            <a:pPr>
               <a:buFont typeface="Arial" panose="020B0604020202020204" pitchFamily="34" charset="0"/>
               <a:buChar char="•"/>
             </a:pPr>
@@ -25656,7 +25633,7 @@
             </a:r>
             <a:r>
               <a:rPr lang="en-US" sz="2000" dirty="0"/>
-              <a:t>.</a:t>
+              <a:t>. </a:t>
             </a:r>
             <a:r>
               <a:rPr lang="el-GR" sz="2000" dirty="0"/>
@@ -25714,7 +25691,7 @@
                   </a:schemeClr>
                 </a:solidFill>
               </a:rPr>
-              <a:t>3.</a:t>
+              <a:t>3. </a:t>
             </a:r>
             <a:r>
               <a:rPr lang="en-US" sz="2000" dirty="0"/>
@@ -25871,7 +25848,15 @@
             </a:r>
             <a:r>
               <a:rPr lang="en-US" dirty="0"/>
-              <a:t> scratch </a:t>
+              <a:t> “</a:t>
+            </a:r>
+            <a:r>
+              <a:rPr lang="en-US" b="1" dirty="0"/>
+              <a:t>scratch</a:t>
+            </a:r>
+            <a:r>
+              <a:rPr lang="en-US" dirty="0"/>
+              <a:t>”</a:t>
             </a:r>
             <a:r>
               <a:rPr lang="el-GR" dirty="0"/>
@@ -25891,11 +25876,7 @@
             </a:r>
             <a:r>
               <a:rPr lang="el-GR" dirty="0"/>
-              <a:t> ερωτήματος στο αρχείο </a:t>
-            </a:r>
-            <a:r>
-              <a:rPr lang="en-US" dirty="0"/>
-              <a:t>mypoint.cc</a:t>
+              <a:t> ερωτήματος</a:t>
             </a:r>
           </a:p>
           <a:p>
@@ -25905,7 +25886,7 @@
             </a:pPr>
             <a:r>
               <a:rPr lang="el-GR" dirty="0"/>
-              <a:t>Έγινε χρήση των </a:t>
+              <a:t> Έγινε χρήση των </a:t>
             </a:r>
             <a:r>
               <a:rPr lang="en-US" dirty="0"/>
@@ -25917,21 +25898,8 @@
             </a:r>
             <a:r>
               <a:rPr lang="en-US" dirty="0"/>
-              <a:t>flow- monitoring -</a:t>
-            </a:r>
-            <a:r>
-              <a:rPr lang="en-US" dirty="0" err="1"/>
-              <a:t>module.h</a:t>
-            </a:r>
-            <a:r>
-              <a:rPr lang="en-US" dirty="0"/>
-              <a:t> , point-to-point-</a:t>
-            </a:r>
-            <a:r>
-              <a:rPr lang="en-US" dirty="0" err="1"/>
-              <a:t>module.h</a:t>
-            </a:r>
-            <a:endParaRPr lang="en-US" dirty="0"/>
+              <a:t>flow- monitoring -module.h , point-to-point-module.h</a:t>
+            </a:r>
           </a:p>
           <a:p>
             <a:pPr algn="just">
@@ -26122,8 +26090,8 @@
         </p:nvSpPr>
         <p:spPr>
           <a:xfrm>
-            <a:off x="1024127" y="2579914"/>
-            <a:ext cx="4754880" cy="3489810"/>
+            <a:off x="1024127" y="2583662"/>
+            <a:ext cx="4668112" cy="2653146"/>
           </a:xfrm>
         </p:spPr>
         <p:txBody>
@@ -26132,7 +26100,7 @@
           </a:bodyPr>
           <a:lstStyle/>
           <a:p>
-            <a:pPr>
+            <a:pPr algn="just">
               <a:buFont typeface="Arial" panose="020B0604020202020204" pitchFamily="34" charset="0"/>
               <a:buChar char="•"/>
             </a:pPr>
@@ -26158,10 +26126,46 @@
             </a:r>
           </a:p>
           <a:p>
-            <a:pPr marL="0" indent="0">
+            <a:pPr marL="0" indent="0" algn="just">
               <a:buNone/>
             </a:pPr>
-            <a:endParaRPr lang="el-GR" u="sng" dirty="0"/>
+            <a:endParaRPr lang="el-GR" dirty="0"/>
+          </a:p>
+          <a:p>
+            <a:pPr lvl="2" algn="just"/>
+            <a:r>
+              <a:rPr lang="el-GR" sz="1700" dirty="0"/>
+              <a:t>Παρατηρούμε την ροή πακέτων από τον έναν κόμβο στον άλλον. Το κάθε ένα από τα 4 </a:t>
+            </a:r>
+            <a:r>
+              <a:rPr lang="en-US" sz="1700" dirty="0"/>
+              <a:t>flows</a:t>
+            </a:r>
+            <a:r>
+              <a:rPr lang="el-GR" sz="1700" dirty="0"/>
+              <a:t> είναι η επικοινωνία μεταξύ</a:t>
+            </a:r>
+            <a:r>
+              <a:rPr lang="en-US" sz="1700" dirty="0"/>
+              <a:t> server</a:t>
+            </a:r>
+            <a:r>
+              <a:rPr lang="el-GR" sz="1700" dirty="0"/>
+              <a:t> </a:t>
+            </a:r>
+            <a:r>
+              <a:rPr lang="en-US" sz="1700" dirty="0"/>
+              <a:t>(node 0) </a:t>
+            </a:r>
+            <a:r>
+              <a:rPr lang="el-GR" sz="1700" dirty="0"/>
+              <a:t>στον </a:t>
+            </a:r>
+            <a:r>
+              <a:rPr lang="en-US" sz="1700" dirty="0"/>
+              <a:t>client (node 1).</a:t>
+            </a:r>
+            <a:endParaRPr lang="el-GR" sz="1700" dirty="0"/>
           </a:p>
         </p:txBody>
       </p:sp>
@@ -26350,7 +26354,7 @@
                 <a:ea typeface="Calibri" panose="020F0502020204030204" pitchFamily="34" charset="0"/>
                 <a:cs typeface="Calibri" panose="020F0502020204030204" pitchFamily="34" charset="0"/>
               </a:rPr>
-              <a:t>AODVN(Ad hoc </a:t>
+              <a:t>AODVN (Ad hoc </a:t>
             </a:r>
             <a:r>
               <a:rPr lang="en-US" sz="1700" dirty="0">
@@ -26484,23 +26488,7 @@
                 <a:ea typeface="Calibri" panose="020F0502020204030204" pitchFamily="34" charset="0"/>
                 <a:cs typeface="Calibri" panose="020F0502020204030204" pitchFamily="34" charset="0"/>
               </a:rPr>
-              <a:t>module </a:t>
-            </a:r>
-            <a:r>
-              <a:rPr lang="en-US" altLang="el-GR" sz="1700" dirty="0" err="1">
-                <a:latin typeface="Calibri" panose="020F0502020204030204" pitchFamily="34" charset="0"/>
-                <a:ea typeface="Calibri" panose="020F0502020204030204" pitchFamily="34" charset="0"/>
-                <a:cs typeface="Calibri" panose="020F0502020204030204" pitchFamily="34" charset="0"/>
-              </a:rPr>
-              <a:t>olsr-helper.h</a:t>
-            </a:r>
-            <a:r>
-              <a:rPr lang="en-US" altLang="el-GR" sz="1700" dirty="0">
-                <a:latin typeface="Calibri" panose="020F0502020204030204" pitchFamily="34" charset="0"/>
-                <a:ea typeface="Calibri" panose="020F0502020204030204" pitchFamily="34" charset="0"/>
-                <a:cs typeface="Calibri" panose="020F0502020204030204" pitchFamily="34" charset="0"/>
-              </a:rPr>
-              <a:t>, ns3/applications-module.h, </a:t>
+              <a:t>module olsr-helper.h, ns3/applications-module.h, </a:t>
             </a:r>
             <a:br>
               <a:rPr lang="en-US" altLang="el-GR" sz="1700" dirty="0">
@@ -26856,25 +26844,23 @@
         </p:nvSpPr>
         <p:spPr>
           <a:xfrm>
-            <a:off x="732466" y="2249294"/>
-            <a:ext cx="9720073" cy="4023360"/>
+            <a:off x="736425" y="2447216"/>
+            <a:ext cx="4936022" cy="3854623"/>
           </a:xfrm>
         </p:spPr>
         <p:txBody>
           <a:bodyPr/>
           <a:lstStyle/>
           <a:p>
-            <a:pPr marL="0" indent="0">
-              <a:buNone/>
+            <a:pPr algn="just">
+              <a:buFont typeface="Arial" panose="020B0604020202020204" pitchFamily="34" charset="0"/>
+              <a:buChar char="•"/>
             </a:pPr>
             <a:r>
               <a:rPr lang="el-GR" dirty="0"/>
-              <a:t>Όσον αφορά το δεύτερο ερώτημα της εργασίας, η τοπολογία που δημιουργήθηκε είναι η εξής </a:t>
-            </a:r>
-            <a:r>
-              <a:rPr lang="en-US" dirty="0"/>
-              <a:t>:</a:t>
-            </a:r>
+              <a:t> Με αντίστοιχο τρόπο με το πρώτο ερώτημα δημιουργήσαμε ένα αρχείο το στο οποίο υλοποιήσαμε την εξής τοπολογία 5 κόμβων:</a:t>
+            </a:r>
+            <a:endParaRPr lang="en-US" dirty="0"/>
           </a:p>
           <a:p>
             <a:pPr marL="0" indent="0">
@@ -26960,7 +26946,7 @@
         </p:blipFill>
         <p:spPr>
           <a:xfrm>
-            <a:off x="3685805" y="3024975"/>
+            <a:off x="7058857" y="3248290"/>
             <a:ext cx="4396718" cy="3247679"/>
           </a:xfrm>
           <a:prstGeom prst="rect">
@@ -27818,6 +27804,14 @@
 </file>
 
 <file path=customXml/item2.xml><?xml version="1.0" encoding="utf-8"?>
+<p:properties xmlns:p="http://schemas.microsoft.com/office/2006/metadata/properties" xmlns:xsi="http://www.w3.org/2001/XMLSchema-instance" xmlns:pc="http://schemas.microsoft.com/office/infopath/2007/PartnerControls">
+  <documentManagement>
+    <MediaServiceKeyPoints xmlns="71af3243-3dd4-4a8d-8c0d-dd76da1f02a5" xsi:nil="true"/>
+  </documentManagement>
+</p:properties>
+</file>
+
+<file path=customXml/item3.xml><?xml version="1.0" encoding="utf-8"?>
 <ct:contentTypeSchema xmlns:ct="http://schemas.microsoft.com/office/2006/metadata/contentType" xmlns:ma="http://schemas.microsoft.com/office/2006/metadata/properties/metaAttributes" ct:_="" ma:_="" ma:contentTypeName="Document" ma:contentTypeID="0x01010079F111ED35F8CC479449609E8A0923A6" ma:contentTypeVersion="11" ma:contentTypeDescription="Create a new document." ma:contentTypeScope="" ma:versionID="9677210f24a1be23c92c90fd886aa0aa">
   <xsd:schema xmlns:xsd="http://www.w3.org/2001/XMLSchema" xmlns:xs="http://www.w3.org/2001/XMLSchema" xmlns:p="http://schemas.microsoft.com/office/2006/metadata/properties" xmlns:ns2="71af3243-3dd4-4a8d-8c0d-dd76da1f02a5" xmlns:ns3="16c05727-aa75-4e4a-9b5f-8a80a1165891" targetNamespace="http://schemas.microsoft.com/office/2006/metadata/properties" ma:root="true" ma:fieldsID="60e05723c5c1908df1a1a4ebf11d344e" ns2:_="" ns3:_="">
     <xsd:import namespace="71af3243-3dd4-4a8d-8c0d-dd76da1f02a5"/>
@@ -28028,14 +28022,6 @@
 </ct:contentTypeSchema>
 </file>
 
-<file path=customXml/item3.xml><?xml version="1.0" encoding="utf-8"?>
-<p:properties xmlns:p="http://schemas.microsoft.com/office/2006/metadata/properties" xmlns:xsi="http://www.w3.org/2001/XMLSchema-instance" xmlns:pc="http://schemas.microsoft.com/office/infopath/2007/PartnerControls">
-  <documentManagement>
-    <MediaServiceKeyPoints xmlns="71af3243-3dd4-4a8d-8c0d-dd76da1f02a5" xsi:nil="true"/>
-  </documentManagement>
-</p:properties>
-</file>
-
 <file path=customXml/itemProps1.xml><?xml version="1.0" encoding="utf-8"?>
 <ds:datastoreItem xmlns:ds="http://schemas.openxmlformats.org/officeDocument/2006/customXml" ds:itemID="{4F44C90D-2A62-4985-9618-3460247437B1}">
   <ds:schemaRefs>
@@ -28045,6 +28031,23 @@
 </file>
 
 <file path=customXml/itemProps2.xml><?xml version="1.0" encoding="utf-8"?>
+<ds:datastoreItem xmlns:ds="http://schemas.openxmlformats.org/officeDocument/2006/customXml" ds:itemID="{788A2F88-55C5-4ED1-9541-807C65424763}">
+  <ds:schemaRefs>
+    <ds:schemaRef ds:uri="http://schemas.microsoft.com/office/2006/documentManagement/types"/>
+    <ds:schemaRef ds:uri="http://schemas.microsoft.com/office/2006/metadata/properties"/>
+    <ds:schemaRef ds:uri="http://purl.org/dc/elements/1.1/"/>
+    <ds:schemaRef ds:uri="http://www.w3.org/XML/1998/namespace"/>
+    <ds:schemaRef ds:uri="16c05727-aa75-4e4a-9b5f-8a80a1165891"/>
+    <ds:schemaRef ds:uri="http://purl.org/dc/dcmitype/"/>
+    <ds:schemaRef ds:uri="71af3243-3dd4-4a8d-8c0d-dd76da1f02a5"/>
+    <ds:schemaRef ds:uri="http://schemas.microsoft.com/office/infopath/2007/PartnerControls"/>
+    <ds:schemaRef ds:uri="http://schemas.openxmlformats.org/package/2006/metadata/core-properties"/>
+    <ds:schemaRef ds:uri="http://purl.org/dc/terms/"/>
+  </ds:schemaRefs>
+</ds:datastoreItem>
+</file>
+
+<file path=customXml/itemProps3.xml><?xml version="1.0" encoding="utf-8"?>
 <ds:datastoreItem xmlns:ds="http://schemas.openxmlformats.org/officeDocument/2006/customXml" ds:itemID="{B61EAB5F-88FC-4FAE-AE3C-037A3C365EB8}">
   <ds:schemaRefs>
     <ds:schemaRef ds:uri="http://schemas.microsoft.com/office/2006/metadata/contentType"/>
@@ -28061,21 +28064,4 @@
     <ds:schemaRef ds:uri="http://schemas.microsoft.com/internal/obd"/>
   </ds:schemaRefs>
 </ds:datastoreItem>
-</file>
-
-<file path=customXml/itemProps3.xml><?xml version="1.0" encoding="utf-8"?>
-<ds:datastoreItem xmlns:ds="http://schemas.openxmlformats.org/officeDocument/2006/customXml" ds:itemID="{788A2F88-55C5-4ED1-9541-807C65424763}">
-  <ds:schemaRefs>
-    <ds:schemaRef ds:uri="http://schemas.microsoft.com/office/2006/documentManagement/types"/>
-    <ds:schemaRef ds:uri="http://schemas.microsoft.com/office/2006/metadata/properties"/>
-    <ds:schemaRef ds:uri="http://purl.org/dc/elements/1.1/"/>
-    <ds:schemaRef ds:uri="http://www.w3.org/XML/1998/namespace"/>
-    <ds:schemaRef ds:uri="16c05727-aa75-4e4a-9b5f-8a80a1165891"/>
-    <ds:schemaRef ds:uri="http://purl.org/dc/dcmitype/"/>
-    <ds:schemaRef ds:uri="71af3243-3dd4-4a8d-8c0d-dd76da1f02a5"/>
-    <ds:schemaRef ds:uri="http://schemas.microsoft.com/office/infopath/2007/PartnerControls"/>
-    <ds:schemaRef ds:uri="http://schemas.openxmlformats.org/package/2006/metadata/core-properties"/>
-    <ds:schemaRef ds:uri="http://purl.org/dc/terms/"/>
-  </ds:schemaRefs>
-</ds:datastoreItem>
 </file>
--- a/Presentations/Ns-3_presentation_F.pptx
+++ b/Presentations/Ns-3_presentation_F.pptx
@@ -24019,8 +24019,8 @@
         </p:nvSpPr>
         <p:spPr>
           <a:xfrm>
-            <a:off x="1042058" y="659768"/>
-            <a:ext cx="6488296" cy="1213856"/>
+            <a:off x="1024128" y="585216"/>
+            <a:ext cx="9720072" cy="1499616"/>
           </a:xfrm>
         </p:spPr>
         <p:txBody>
@@ -24044,37 +24044,6 @@
           </a:p>
         </p:txBody>
       </p:sp>
-      <p:pic>
-        <p:nvPicPr>
-          <p:cNvPr id="5" name="Picture 4" descr="A screenshot of a computer&#10;&#10;AI-generated content may be incorrect.">
-            <a:extLst>
-              <a:ext uri="{FF2B5EF4-FFF2-40B4-BE49-F238E27FC236}">
-                <a16:creationId xmlns:a16="http://schemas.microsoft.com/office/drawing/2014/main" id="{D76E9FFE-28CA-03E3-8840-E040B5431687}"/>
-              </a:ext>
-            </a:extLst>
-          </p:cNvPr>
-          <p:cNvPicPr>
-            <a:picLocks noChangeAspect="1"/>
-          </p:cNvPicPr>
-          <p:nvPr/>
-        </p:nvPicPr>
-        <p:blipFill>
-          <a:blip r:embed="rId2"/>
-          <a:stretch>
-            <a:fillRect/>
-          </a:stretch>
-        </p:blipFill>
-        <p:spPr>
-          <a:xfrm>
-            <a:off x="5353993" y="2079813"/>
-            <a:ext cx="6366467" cy="3835795"/>
-          </a:xfrm>
-          <a:prstGeom prst="rect">
-            <a:avLst/>
-          </a:prstGeom>
-          <a:noFill/>
-        </p:spPr>
-      </p:pic>
       <p:sp>
         <p:nvSpPr>
           <p:cNvPr id="3" name="Θέση περιεχομένου 2">
@@ -24088,60 +24057,65 @@
             <a:spLocks noGrp="1"/>
           </p:cNvSpPr>
           <p:nvPr>
-            <p:ph type="body" sz="half" idx="2"/>
+            <p:ph sz="half" idx="1"/>
           </p:nvPr>
         </p:nvSpPr>
         <p:spPr>
           <a:xfrm>
-            <a:off x="856176" y="2257505"/>
-            <a:ext cx="4247669" cy="2697049"/>
+            <a:off x="1024128" y="2286000"/>
+            <a:ext cx="4311852" cy="3703122"/>
           </a:xfrm>
         </p:spPr>
         <p:txBody>
           <a:bodyPr>
-            <a:normAutofit fontScale="92500" lnSpcReduction="20000"/>
+            <a:normAutofit fontScale="92500" lnSpcReduction="10000"/>
           </a:bodyPr>
           <a:lstStyle/>
           <a:p>
-            <a:pPr algn="just"/>
-            <a:r>
-              <a:rPr lang="el-GR" sz="1800" dirty="0"/>
+            <a:r>
+              <a:rPr lang="el-GR" dirty="0"/>
               <a:t>Τα αρχεία του κώδικα καθώς και η</a:t>
             </a:r>
             <a:r>
-              <a:rPr lang="en-US" sz="1800" dirty="0"/>
+              <a:rPr lang="en-US" dirty="0"/>
               <a:t> </a:t>
             </a:r>
             <a:r>
-              <a:rPr lang="el-GR" sz="1800" dirty="0"/>
+              <a:rPr lang="el-GR" dirty="0"/>
               <a:t>παρουσίαση βρίσκονται στο εξής </a:t>
             </a:r>
             <a:r>
-              <a:rPr lang="en-US" sz="1800" dirty="0"/>
+              <a:rPr lang="en-US" dirty="0"/>
               <a:t>public repository </a:t>
             </a:r>
             <a:r>
-              <a:rPr lang="el-GR" sz="1800" dirty="0"/>
+              <a:rPr lang="el-GR" dirty="0"/>
               <a:t>με </a:t>
             </a:r>
             <a:r>
-              <a:rPr lang="en-US" sz="1800" dirty="0"/>
+              <a:rPr lang="en-US" dirty="0"/>
               <a:t>link:</a:t>
             </a:r>
-            <a:endParaRPr lang="el-GR" sz="1800" dirty="0"/>
+            <a:endParaRPr lang="el-GR" dirty="0"/>
           </a:p>
           <a:p>
             <a:br>
-              <a:rPr lang="el-GR" sz="1800" dirty="0"/>
-            </a:br>
-            <a:r>
-              <a:rPr lang="en-US" sz="1800" dirty="0">
+              <a:rPr lang="el-GR" dirty="0">
                 <a:solidFill>
-                  <a:schemeClr val="accent2">
+                  <a:schemeClr val="accent1">
                     <a:lumMod val="75000"/>
                   </a:schemeClr>
                 </a:solidFill>
-                <a:hlinkClick r:id="rId3">
+              </a:rPr>
+            </a:br>
+            <a:r>
+              <a:rPr lang="en-US" dirty="0">
+                <a:solidFill>
+                  <a:schemeClr val="accent1">
+                    <a:lumMod val="75000"/>
+                  </a:schemeClr>
+                </a:solidFill>
+                <a:hlinkClick r:id="rId2">
                   <a:extLst>
                     <a:ext uri="{A12FA001-AC4F-418D-AE19-62706E023703}">
                       <ahyp:hlinkClr xmlns:ahyp="http://schemas.microsoft.com/office/drawing/2018/hyperlinkcolor" val="tx"/>
@@ -24151,17 +24125,20 @@
               </a:rPr>
               <a:t>https://github.com/grgmyl/Ns3Project/tree/main</a:t>
             </a:r>
-            <a:endParaRPr lang="en-US" sz="1800" dirty="0">
+            <a:endParaRPr lang="en-US" dirty="0">
               <a:solidFill>
-                <a:schemeClr val="accent2">
+                <a:schemeClr val="accent1">
                   <a:lumMod val="75000"/>
                 </a:schemeClr>
               </a:solidFill>
             </a:endParaRPr>
           </a:p>
           <a:p>
+            <a:endParaRPr lang="en-US" dirty="0"/>
+          </a:p>
+          <a:p>
             <a:br>
-              <a:rPr lang="en-US" sz="1800" dirty="0"/>
+              <a:rPr lang="en-US" dirty="0"/>
             </a:br>
             <a:br>
               <a:rPr lang="en-US" dirty="0"/>
@@ -24172,14 +24149,41 @@
             <a:br>
               <a:rPr lang="el-GR" dirty="0"/>
             </a:br>
-            <a:endParaRPr lang="el-GR" b="1" dirty="0">
-              <a:solidFill>
-                <a:srgbClr val="FF0000"/>
-              </a:solidFill>
-            </a:endParaRPr>
+            <a:endParaRPr lang="el-GR" b="1" dirty="0"/>
           </a:p>
         </p:txBody>
       </p:sp>
+      <p:pic>
+        <p:nvPicPr>
+          <p:cNvPr id="6" name="Picture 5">
+            <a:extLst>
+              <a:ext uri="{FF2B5EF4-FFF2-40B4-BE49-F238E27FC236}">
+                <a16:creationId xmlns:a16="http://schemas.microsoft.com/office/drawing/2014/main" id="{15D8425C-6F45-9DE1-7630-2A66FE55447E}"/>
+              </a:ext>
+            </a:extLst>
+          </p:cNvPr>
+          <p:cNvPicPr>
+            <a:picLocks noChangeAspect="1"/>
+          </p:cNvPicPr>
+          <p:nvPr/>
+        </p:nvPicPr>
+        <p:blipFill>
+          <a:blip r:embed="rId3"/>
+          <a:stretch>
+            <a:fillRect/>
+          </a:stretch>
+        </p:blipFill>
+        <p:spPr>
+          <a:xfrm>
+            <a:off x="6542419" y="2286000"/>
+            <a:ext cx="5082367" cy="3062125"/>
+          </a:xfrm>
+          <a:prstGeom prst="rect">
+            <a:avLst/>
+          </a:prstGeom>
+          <a:noFill/>
+        </p:spPr>
+      </p:pic>
     </p:spTree>
     <p:extLst>
       <p:ext uri="{BB962C8B-B14F-4D97-AF65-F5344CB8AC3E}">
@@ -27804,14 +27808,6 @@
 </file>
 
 <file path=customXml/item2.xml><?xml version="1.0" encoding="utf-8"?>
-<p:properties xmlns:p="http://schemas.microsoft.com/office/2006/metadata/properties" xmlns:xsi="http://www.w3.org/2001/XMLSchema-instance" xmlns:pc="http://schemas.microsoft.com/office/infopath/2007/PartnerControls">
-  <documentManagement>
-    <MediaServiceKeyPoints xmlns="71af3243-3dd4-4a8d-8c0d-dd76da1f02a5" xsi:nil="true"/>
-  </documentManagement>
-</p:properties>
-</file>
-
-<file path=customXml/item3.xml><?xml version="1.0" encoding="utf-8"?>
 <ct:contentTypeSchema xmlns:ct="http://schemas.microsoft.com/office/2006/metadata/contentType" xmlns:ma="http://schemas.microsoft.com/office/2006/metadata/properties/metaAttributes" ct:_="" ma:_="" ma:contentTypeName="Document" ma:contentTypeID="0x01010079F111ED35F8CC479449609E8A0923A6" ma:contentTypeVersion="11" ma:contentTypeDescription="Create a new document." ma:contentTypeScope="" ma:versionID="9677210f24a1be23c92c90fd886aa0aa">
   <xsd:schema xmlns:xsd="http://www.w3.org/2001/XMLSchema" xmlns:xs="http://www.w3.org/2001/XMLSchema" xmlns:p="http://schemas.microsoft.com/office/2006/metadata/properties" xmlns:ns2="71af3243-3dd4-4a8d-8c0d-dd76da1f02a5" xmlns:ns3="16c05727-aa75-4e4a-9b5f-8a80a1165891" targetNamespace="http://schemas.microsoft.com/office/2006/metadata/properties" ma:root="true" ma:fieldsID="60e05723c5c1908df1a1a4ebf11d344e" ns2:_="" ns3:_="">
     <xsd:import namespace="71af3243-3dd4-4a8d-8c0d-dd76da1f02a5"/>
@@ -28022,6 +28018,14 @@
 </ct:contentTypeSchema>
 </file>
 
+<file path=customXml/item3.xml><?xml version="1.0" encoding="utf-8"?>
+<p:properties xmlns:p="http://schemas.microsoft.com/office/2006/metadata/properties" xmlns:xsi="http://www.w3.org/2001/XMLSchema-instance" xmlns:pc="http://schemas.microsoft.com/office/infopath/2007/PartnerControls">
+  <documentManagement>
+    <MediaServiceKeyPoints xmlns="71af3243-3dd4-4a8d-8c0d-dd76da1f02a5" xsi:nil="true"/>
+  </documentManagement>
+</p:properties>
+</file>
+
 <file path=customXml/itemProps1.xml><?xml version="1.0" encoding="utf-8"?>
 <ds:datastoreItem xmlns:ds="http://schemas.openxmlformats.org/officeDocument/2006/customXml" ds:itemID="{4F44C90D-2A62-4985-9618-3460247437B1}">
   <ds:schemaRefs>
@@ -28031,23 +28035,6 @@
 </file>
 
 <file path=customXml/itemProps2.xml><?xml version="1.0" encoding="utf-8"?>
-<ds:datastoreItem xmlns:ds="http://schemas.openxmlformats.org/officeDocument/2006/customXml" ds:itemID="{788A2F88-55C5-4ED1-9541-807C65424763}">
-  <ds:schemaRefs>
-    <ds:schemaRef ds:uri="http://schemas.microsoft.com/office/2006/documentManagement/types"/>
-    <ds:schemaRef ds:uri="http://schemas.microsoft.com/office/2006/metadata/properties"/>
-    <ds:schemaRef ds:uri="http://purl.org/dc/elements/1.1/"/>
-    <ds:schemaRef ds:uri="http://www.w3.org/XML/1998/namespace"/>
-    <ds:schemaRef ds:uri="16c05727-aa75-4e4a-9b5f-8a80a1165891"/>
-    <ds:schemaRef ds:uri="http://purl.org/dc/dcmitype/"/>
-    <ds:schemaRef ds:uri="71af3243-3dd4-4a8d-8c0d-dd76da1f02a5"/>
-    <ds:schemaRef ds:uri="http://schemas.microsoft.com/office/infopath/2007/PartnerControls"/>
-    <ds:schemaRef ds:uri="http://schemas.openxmlformats.org/package/2006/metadata/core-properties"/>
-    <ds:schemaRef ds:uri="http://purl.org/dc/terms/"/>
-  </ds:schemaRefs>
-</ds:datastoreItem>
-</file>
-
-<file path=customXml/itemProps3.xml><?xml version="1.0" encoding="utf-8"?>
 <ds:datastoreItem xmlns:ds="http://schemas.openxmlformats.org/officeDocument/2006/customXml" ds:itemID="{B61EAB5F-88FC-4FAE-AE3C-037A3C365EB8}">
   <ds:schemaRefs>
     <ds:schemaRef ds:uri="http://schemas.microsoft.com/office/2006/metadata/contentType"/>
@@ -28064,4 +28051,21 @@
     <ds:schemaRef ds:uri="http://schemas.microsoft.com/internal/obd"/>
   </ds:schemaRefs>
 </ds:datastoreItem>
+</file>
+
+<file path=customXml/itemProps3.xml><?xml version="1.0" encoding="utf-8"?>
+<ds:datastoreItem xmlns:ds="http://schemas.openxmlformats.org/officeDocument/2006/customXml" ds:itemID="{788A2F88-55C5-4ED1-9541-807C65424763}">
+  <ds:schemaRefs>
+    <ds:schemaRef ds:uri="http://schemas.microsoft.com/office/2006/documentManagement/types"/>
+    <ds:schemaRef ds:uri="http://schemas.microsoft.com/office/2006/metadata/properties"/>
+    <ds:schemaRef ds:uri="http://purl.org/dc/elements/1.1/"/>
+    <ds:schemaRef ds:uri="http://www.w3.org/XML/1998/namespace"/>
+    <ds:schemaRef ds:uri="16c05727-aa75-4e4a-9b5f-8a80a1165891"/>
+    <ds:schemaRef ds:uri="http://purl.org/dc/dcmitype/"/>
+    <ds:schemaRef ds:uri="71af3243-3dd4-4a8d-8c0d-dd76da1f02a5"/>
+    <ds:schemaRef ds:uri="http://schemas.microsoft.com/office/infopath/2007/PartnerControls"/>
+    <ds:schemaRef ds:uri="http://schemas.openxmlformats.org/package/2006/metadata/core-properties"/>
+    <ds:schemaRef ds:uri="http://purl.org/dc/terms/"/>
+  </ds:schemaRefs>
+</ds:datastoreItem>
 </file>
--- a/Presentations/Ns-3_presentation_F.pptx
+++ b/Presentations/Ns-3_presentation_F.pptx
@@ -21838,9 +21838,16 @@
               <a:rPr lang="el-GR" sz="2100" dirty="0"/>
               <a:t>και </a:t>
             </a:r>
-            <a:r>
+            <a:br>
               <a:rPr lang="en-US" sz="2100" dirty="0"/>
-              <a:t>double </a:t>
+            </a:br>
+            <a:r>
+              <a:rPr lang="en-US" sz="2100" b="1" dirty="0"/>
+              <a:t>double</a:t>
+            </a:r>
+            <a:r>
+              <a:rPr lang="en-US" sz="2100" dirty="0"/>
+              <a:t> </a:t>
             </a:r>
             <a:r>
               <a:rPr lang="en-US" sz="2100" b="1" dirty="0"/>
@@ -22201,7 +22208,7 @@
         <p:spPr>
           <a:xfrm>
             <a:off x="6654591" y="5661067"/>
-            <a:ext cx="4763666" cy="923330"/>
+            <a:ext cx="4763666" cy="1200329"/>
           </a:xfrm>
           <a:prstGeom prst="rect">
             <a:avLst/>
@@ -22232,7 +22239,21 @@
             </a:r>
             <a:r>
               <a:rPr lang="en-US" dirty="0"/>
-              <a:t>: rate=5Mbps, delay=50ms </a:t>
+              <a:t>: </a:t>
+            </a:r>
+            <a:r>
+              <a:rPr lang="en-US" dirty="0">
+                <a:solidFill>
+                  <a:schemeClr val="accent1">
+                    <a:lumMod val="75000"/>
+                  </a:schemeClr>
+                </a:solidFill>
+              </a:rPr>
+              <a:t>rate=5Mbps</a:t>
+            </a:r>
+            <a:r>
+              <a:rPr lang="en-US" dirty="0"/>
+              <a:t>, delay=50ms </a:t>
             </a:r>
             <a:r>
               <a:rPr lang="en-US" dirty="0" err="1"/>
@@ -22240,8 +22261,10 @@
             </a:r>
             <a:r>
               <a:rPr lang="en-US" dirty="0"/>
-              <a:t>=15,packetSize=1200,</a:t>
-            </a:r>
+              <a:t>=15,packetSize=1200bytes,</a:t>
+            </a:r>
+          </a:p>
+          <a:p>
             <a:r>
               <a:rPr lang="en-US" dirty="0">
                 <a:solidFill>
@@ -22254,7 +22277,14 @@
             </a:r>
             <a:r>
               <a:rPr lang="en-US" dirty="0"/>
-              <a:t>,failDownAt=6.0s,failUpAt=8.0s.</a:t>
+              <a:t>,</a:t>
+            </a:r>
+            <a:br>
+              <a:rPr lang="el-GR" dirty="0"/>
+            </a:br>
+            <a:r>
+              <a:rPr lang="en-US" dirty="0"/>
+              <a:t>failDownAt=6.0s,failUpAt=8.0s.</a:t>
             </a:r>
           </a:p>
         </p:txBody>
@@ -22274,7 +22304,7 @@
         <p:spPr>
           <a:xfrm>
             <a:off x="293617" y="5661198"/>
-            <a:ext cx="4831977" cy="923330"/>
+            <a:ext cx="4831977" cy="1200329"/>
           </a:xfrm>
           <a:prstGeom prst="rect">
             <a:avLst/>
@@ -22300,27 +22330,7 @@
             </a:r>
             <a:r>
               <a:rPr lang="en-US" dirty="0"/>
-              <a:t>: rate=3Mbps</a:t>
-            </a:r>
-            <a:r>
-              <a:rPr lang="el-GR" dirty="0"/>
-              <a:t>,</a:t>
-            </a:r>
-            <a:r>
-              <a:rPr lang="en-US" dirty="0"/>
-              <a:t>delay=30ms, </a:t>
-            </a:r>
-            <a:r>
-              <a:rPr lang="en-US" dirty="0" err="1"/>
-              <a:t>qMaxPkts</a:t>
-            </a:r>
-            <a:r>
-              <a:rPr lang="en-US" dirty="0"/>
-              <a:t>=15,packetSize=1200</a:t>
-            </a:r>
-            <a:r>
-              <a:rPr lang="el-GR" dirty="0"/>
-              <a:t>,</a:t>
+              <a:t>: </a:t>
             </a:r>
             <a:r>
               <a:rPr lang="en-US" dirty="0">
@@ -22330,8 +22340,47 @@
                   </a:schemeClr>
                 </a:solidFill>
               </a:rPr>
-              <a:t>interval=0.001s,</a:t>
-            </a:r>
+              <a:t>rate=3Mbps</a:t>
+            </a:r>
+            <a:r>
+              <a:rPr lang="el-GR" dirty="0"/>
+              <a:t>,</a:t>
+            </a:r>
+            <a:r>
+              <a:rPr lang="en-US" dirty="0"/>
+              <a:t>delay=30ms, </a:t>
+            </a:r>
+            <a:r>
+              <a:rPr lang="en-US" dirty="0" err="1"/>
+              <a:t>qMaxPkts</a:t>
+            </a:r>
+            <a:r>
+              <a:rPr lang="en-US" dirty="0"/>
+              <a:t>=15,packetSize=1200 bytes,</a:t>
+            </a:r>
+          </a:p>
+          <a:p>
+            <a:r>
+              <a:rPr lang="en-US" dirty="0">
+                <a:solidFill>
+                  <a:schemeClr val="accent1">
+                    <a:lumMod val="75000"/>
+                  </a:schemeClr>
+                </a:solidFill>
+              </a:rPr>
+              <a:t>interval=0.001s</a:t>
+            </a:r>
+            <a:r>
+              <a:rPr lang="en-US" dirty="0"/>
+              <a:t>,</a:t>
+            </a:r>
+            <a:endParaRPr lang="en-US" dirty="0">
+              <a:solidFill>
+                <a:schemeClr val="accent1">
+                  <a:lumMod val="75000"/>
+                </a:schemeClr>
+              </a:solidFill>
+            </a:endParaRPr>
           </a:p>
           <a:p>
             <a:r>
@@ -22462,7 +22511,7 @@
             </a:pPr>
             <a:r>
               <a:rPr lang="el-GR" dirty="0"/>
-              <a:t>Παρατηρήσαμε πως η απόδοση του δικτύου εξαρτάται από τον ρυθμό αποστολής και το μέγεθος της ουράς. Όταν το interval είναι μικρό, το δίκτυο υπερφορτώνεται με αυξημένες απώλειες και καθυστέρηση, ενώ με μεγαλύτερο interval επιτυγχάνεται σταθερή ροή, υψηλό PDR και χαμηλό delay.</a:t>
+              <a:t> Παρατηρήσαμε πως η απόδοση του δικτύου εξαρτάται από τον ρυθμό αποστολής και το μέγεθος της ουράς. Όταν το interval είναι μικρό, το δίκτυο υπερφορτώνεται με αυξημένες απώλειες και καθυστέρηση, ενώ με μεγαλύτερο interval επιτυγχάνεται σταθερή ροή, υψηλό PDR και χαμηλό delay.</a:t>
             </a:r>
           </a:p>
           <a:p>
@@ -22472,7 +22521,23 @@
             </a:pPr>
             <a:r>
               <a:rPr lang="el-GR" dirty="0"/>
-              <a:t> Η μεγάλη ουρά μειώνει τις απώλειες αλλά αυξάνει το delay ενώ η  μικρή ουρά (π.χ. 5 πακέτα) μειώνει το delay, αλλά οδηγεί σε περισσότερες απώλειες σε συνθήκες συμφόρησης.</a:t>
+              <a:t> Η μεγάλη ουρά μειώνει τις απώλειες αλλά αυξάνει το delay</a:t>
+            </a:r>
+            <a:r>
+              <a:rPr lang="en-US" dirty="0"/>
+              <a:t>,</a:t>
+            </a:r>
+            <a:r>
+              <a:rPr lang="el-GR" dirty="0"/>
+              <a:t> ενώ η  μικρή ουρά (π.χ. 5 πακέτα) μειώνει το delay</a:t>
+            </a:r>
+            <a:r>
+              <a:rPr lang="en-US" dirty="0"/>
+              <a:t> </a:t>
+            </a:r>
+            <a:r>
+              <a:rPr lang="el-GR" dirty="0"/>
+              <a:t>βέβαια οδηγεί σε περισσότερες απώλειες σε συνθήκες συμφόρησης.</a:t>
             </a:r>
           </a:p>
           <a:p>
@@ -22481,8 +22546,12 @@
               <a:buChar char="•"/>
             </a:pPr>
             <a:r>
+              <a:rPr lang="el-GR"/>
+              <a:t> Συνολικά</a:t>
+            </a:r>
+            <a:r>
               <a:rPr lang="el-GR" dirty="0"/>
-              <a:t>Συνολικά, το OLSR αποδεικνύεται ένα αξιόπιστο πρωτόκολλο δρομολόγησης</a:t>
+              <a:t>, το OLSR αποδεικνύεται ένα αξιόπιστο πρωτόκολλο δρομολόγησης</a:t>
             </a:r>
             <a:r>
               <a:rPr lang="en-US" dirty="0"/>
@@ -22602,7 +22671,7 @@
             </a:pPr>
             <a:r>
               <a:rPr lang="el-GR" dirty="0"/>
-              <a:t>Χρησιμοποιήσαμε  </a:t>
+              <a:t> Χρησιμοποιήσαμε  </a:t>
             </a:r>
             <a:r>
               <a:rPr lang="en-US" dirty="0"/>
@@ -22618,7 +22687,7 @@
             </a:r>
             <a:r>
               <a:rPr lang="el-GR" dirty="0"/>
-              <a:t>.Το </a:t>
+              <a:t>. Το </a:t>
             </a:r>
             <a:r>
               <a:rPr lang="en-GB" dirty="0"/>
@@ -22649,7 +22718,7 @@
             </a:pPr>
             <a:r>
               <a:rPr lang="el-GR" dirty="0"/>
-              <a:t>Βέβαια, το AODV είναι reactive πρωτόκολλο, δηλαδή δημιουργεί διαδρομές μόνο όταν χρειάζονται. Έτσι, στην αρχή υπάρχει μια καθυστέρηση μέχρι να βρεθούν οι διαδρομές μεταξύ των κόμβων. </a:t>
+              <a:t> Βέβαια, το AODV είναι reactive πρωτόκολλο, δηλαδή δημιουργεί διαδρομές μόνο όταν χρειάζονται. Έτσι, στην αρχή υπάρχει μια καθυστέρηση μέχρι να βρεθούν οι διαδρομές μεταξύ των κόμβων. </a:t>
             </a:r>
             <a:endParaRPr lang="en-US" dirty="0"/>
           </a:p>
@@ -22660,7 +22729,7 @@
             </a:pPr>
             <a:r>
               <a:rPr lang="el-GR" dirty="0"/>
-              <a:t>Το warm-up phase βοηθά ώστε αυτές οι διαδρομές να έχουν ήδη δημιουργηθεί πριν ξεκινήσουν οι μετρήσεις.</a:t>
+              <a:t> Το warm-up phase βοηθά ώστε αυτές οι διαδρομές να έχουν ήδη δημιουργηθεί πριν ξεκινήσουν οι μετρήσεις.</a:t>
             </a:r>
             <a:r>
               <a:rPr lang="en-US" dirty="0"/>
@@ -23864,6 +23933,16 @@
               <a:t>1)</a:t>
             </a:r>
             <a:r>
+              <a:rPr lang="el-GR" sz="2000" dirty="0">
+                <a:solidFill>
+                  <a:schemeClr val="accent1">
+                    <a:lumMod val="75000"/>
+                  </a:schemeClr>
+                </a:solidFill>
+              </a:rPr>
+              <a:t> </a:t>
+            </a:r>
+            <a:r>
               <a:rPr lang="el-GR" sz="2000" dirty="0"/>
               <a:t>Πιο γρήγορη επαναφορά του  </a:t>
             </a:r>
@@ -23904,6 +23983,16 @@
               <a:t>2)</a:t>
             </a:r>
             <a:r>
+              <a:rPr lang="el-GR" sz="2000" dirty="0">
+                <a:solidFill>
+                  <a:schemeClr val="accent1">
+                    <a:lumMod val="75000"/>
+                  </a:schemeClr>
+                </a:solidFill>
+              </a:rPr>
+              <a:t> </a:t>
+            </a:r>
+            <a:r>
               <a:rPr lang="el-GR" sz="2000" dirty="0"/>
               <a:t>Λιγότερο </a:t>
             </a:r>
@@ -23913,7 +24002,7 @@
             </a:r>
             <a:r>
               <a:rPr lang="el-GR" sz="2000" dirty="0"/>
-              <a:t> σε σχέση με το μεγαλύτερο </a:t>
+              <a:t> σε σχέση με αυτή το μεγαλύτερο </a:t>
             </a:r>
             <a:r>
               <a:rPr lang="en-US" sz="2000" dirty="0"/>
@@ -23934,6 +24023,16 @@
                 </a:solidFill>
               </a:rPr>
               <a:t>3)</a:t>
+            </a:r>
+            <a:r>
+              <a:rPr lang="el-GR" sz="2000" dirty="0">
+                <a:solidFill>
+                  <a:schemeClr val="accent1">
+                    <a:lumMod val="75000"/>
+                  </a:schemeClr>
+                </a:solidFill>
+              </a:rPr>
+              <a:t> </a:t>
             </a:r>
             <a:r>
               <a:rPr lang="el-GR" sz="2000" dirty="0"/>
@@ -25676,7 +25775,45 @@
             </a:r>
             <a:r>
               <a:rPr lang="el-GR" sz="2000" dirty="0"/>
-              <a:t>λοποιήθηκαν δύο servers UDP echo στον κόμβο 1 σε διαφορετικές θύρες με δημιουργία δύο πελατών  UDP echo στον κόμβο 0. </a:t>
+              <a:t>λοποιήθηκαν δύο </a:t>
+            </a:r>
+            <a:r>
+              <a:rPr lang="el-GR" sz="2000" dirty="0">
+                <a:solidFill>
+                  <a:schemeClr val="accent1">
+                    <a:lumMod val="75000"/>
+                  </a:schemeClr>
+                </a:solidFill>
+              </a:rPr>
+              <a:t>servers UDP echo </a:t>
+            </a:r>
+            <a:r>
+              <a:rPr lang="el-GR" sz="2000" dirty="0"/>
+              <a:t>στον κόμβο 1 σε διαφορετικές θύρες με δημιουργία δύο </a:t>
+            </a:r>
+            <a:r>
+              <a:rPr lang="en-US" sz="2000" dirty="0">
+                <a:solidFill>
+                  <a:schemeClr val="accent1">
+                    <a:lumMod val="75000"/>
+                  </a:schemeClr>
+                </a:solidFill>
+              </a:rPr>
+              <a:t>clients</a:t>
+            </a:r>
+            <a:r>
+              <a:rPr lang="el-GR" sz="2000" dirty="0">
+                <a:solidFill>
+                  <a:schemeClr val="accent1">
+                    <a:lumMod val="75000"/>
+                  </a:schemeClr>
+                </a:solidFill>
+              </a:rPr>
+              <a:t>  UDP echo </a:t>
+            </a:r>
+            <a:r>
+              <a:rPr lang="el-GR" sz="2000" dirty="0"/>
+              <a:t>στον κόμβο 0. </a:t>
             </a:r>
             <a:br>
               <a:rPr lang="el-GR" sz="2000" dirty="0"/>
@@ -25707,7 +25844,17 @@
             </a:r>
             <a:r>
               <a:rPr lang="en-US" sz="2000" dirty="0"/>
-              <a:t>module Flow-Monitoring</a:t>
+              <a:t>module </a:t>
+            </a:r>
+            <a:r>
+              <a:rPr lang="en-US" sz="2000" dirty="0">
+                <a:solidFill>
+                  <a:schemeClr val="accent1">
+                    <a:lumMod val="75000"/>
+                  </a:schemeClr>
+                </a:solidFill>
+              </a:rPr>
+              <a:t>Flow-Monitoring</a:t>
             </a:r>
             <a:r>
               <a:rPr lang="el-GR" sz="2000" dirty="0"/>
@@ -25944,7 +26091,7 @@
             </a:pPr>
             <a:r>
               <a:rPr lang="en-US" dirty="0"/>
-              <a:t>  Packet Size = 1024</a:t>
+              <a:t>  Packet Size = 1024 bytes</a:t>
             </a:r>
           </a:p>
           <a:p>
@@ -26159,7 +26306,7 @@
             </a:r>
             <a:r>
               <a:rPr lang="en-US" sz="1700" dirty="0"/>
-              <a:t>(node 0) </a:t>
+              <a:t>(node 1) </a:t>
             </a:r>
             <a:r>
               <a:rPr lang="el-GR" sz="1700" dirty="0"/>
@@ -26167,7 +26314,7 @@
             </a:r>
             <a:r>
               <a:rPr lang="en-US" sz="1700" dirty="0"/>
-              <a:t>client (node 1).</a:t>
+              <a:t>client (node 0).</a:t>
             </a:r>
             <a:endParaRPr lang="el-GR" sz="1700" dirty="0"/>
           </a:p>
@@ -26288,7 +26435,7 @@
         <p:spPr>
           <a:xfrm>
             <a:off x="723201" y="1867351"/>
-            <a:ext cx="11097088" cy="4308872"/>
+            <a:ext cx="11097088" cy="4047262"/>
           </a:xfrm>
           <a:prstGeom prst="rect">
             <a:avLst/>
@@ -26571,6 +26718,11 @@
             </a:r>
             <a:r>
               <a:rPr lang="en-US" altLang="el-GR" sz="1700" dirty="0">
+                <a:solidFill>
+                  <a:schemeClr val="accent1">
+                    <a:lumMod val="75000"/>
+                  </a:schemeClr>
+                </a:solidFill>
                 <a:latin typeface="Calibri" panose="020F0502020204030204" pitchFamily="34" charset="0"/>
                 <a:ea typeface="Calibri" panose="020F0502020204030204" pitchFamily="34" charset="0"/>
                 <a:cs typeface="Calibri" panose="020F0502020204030204" pitchFamily="34" charset="0"/>
@@ -26652,6 +26804,11 @@
             </a:r>
             <a:r>
               <a:rPr lang="en-US" altLang="el-GR" sz="1700" dirty="0">
+                <a:solidFill>
+                  <a:schemeClr val="accent1">
+                    <a:lumMod val="75000"/>
+                  </a:schemeClr>
+                </a:solidFill>
                 <a:latin typeface="Calibri" panose="020F0502020204030204" pitchFamily="34" charset="0"/>
                 <a:ea typeface="Calibri" panose="020F0502020204030204" pitchFamily="34" charset="0"/>
                 <a:cs typeface="Calibri" panose="020F0502020204030204" pitchFamily="34" charset="0"/>
@@ -26733,6 +26890,11 @@
             </a:r>
             <a:r>
               <a:rPr lang="en-US" altLang="el-GR" sz="1700" dirty="0">
+                <a:solidFill>
+                  <a:schemeClr val="accent1">
+                    <a:lumMod val="75000"/>
+                  </a:schemeClr>
+                </a:solidFill>
                 <a:latin typeface="Calibri" panose="020F0502020204030204" pitchFamily="34" charset="0"/>
                 <a:ea typeface="Calibri" panose="020F0502020204030204" pitchFamily="34" charset="0"/>
                 <a:cs typeface="Calibri" panose="020F0502020204030204" pitchFamily="34" charset="0"/>
@@ -26761,7 +26923,23 @@
                 <a:ea typeface="Calibri" panose="020F0502020204030204" pitchFamily="34" charset="0"/>
                 <a:cs typeface="Calibri" panose="020F0502020204030204" pitchFamily="34" charset="0"/>
               </a:rPr>
-              <a:t>και τα πρότυπα κίνησης πριν ξεκινήσει η συλλογή ακριβών δεδομένων απόδοσης.</a:t>
+              <a:t>και </a:t>
+            </a:r>
+            <a:r>
+              <a:rPr lang="en-US" altLang="el-GR" sz="1700" dirty="0">
+                <a:latin typeface="Calibri" panose="020F0502020204030204" pitchFamily="34" charset="0"/>
+                <a:ea typeface="Calibri" panose="020F0502020204030204" pitchFamily="34" charset="0"/>
+                <a:cs typeface="Calibri" panose="020F0502020204030204" pitchFamily="34" charset="0"/>
+              </a:rPr>
+              <a:t>prototypes</a:t>
+            </a:r>
+            <a:r>
+              <a:rPr lang="el-GR" altLang="el-GR" sz="1700" dirty="0">
+                <a:latin typeface="Calibri" panose="020F0502020204030204" pitchFamily="34" charset="0"/>
+                <a:ea typeface="Calibri" panose="020F0502020204030204" pitchFamily="34" charset="0"/>
+                <a:cs typeface="Calibri" panose="020F0502020204030204" pitchFamily="34" charset="0"/>
+              </a:rPr>
+              <a:t> πριν ξεκινήσει η συλλογή ακριβών δεδομένων απόδοσης.</a:t>
             </a:r>
           </a:p>
           <a:p>
@@ -27799,15 +27977,6 @@
 </file>
 
 <file path=customXml/item1.xml><?xml version="1.0" encoding="utf-8"?>
-<?mso-contentType ?>
-<FormTemplates xmlns="http://schemas.microsoft.com/sharepoint/v3/contenttype/forms">
-  <Display>DocumentLibraryForm</Display>
-  <Edit>DocumentLibraryForm</Edit>
-  <New>DocumentLibraryForm</New>
-</FormTemplates>
-</file>
-
-<file path=customXml/item2.xml><?xml version="1.0" encoding="utf-8"?>
 <ct:contentTypeSchema xmlns:ct="http://schemas.microsoft.com/office/2006/metadata/contentType" xmlns:ma="http://schemas.microsoft.com/office/2006/metadata/properties/metaAttributes" ct:_="" ma:_="" ma:contentTypeName="Document" ma:contentTypeID="0x01010079F111ED35F8CC479449609E8A0923A6" ma:contentTypeVersion="11" ma:contentTypeDescription="Create a new document." ma:contentTypeScope="" ma:versionID="9677210f24a1be23c92c90fd886aa0aa">
   <xsd:schema xmlns:xsd="http://www.w3.org/2001/XMLSchema" xmlns:xs="http://www.w3.org/2001/XMLSchema" xmlns:p="http://schemas.microsoft.com/office/2006/metadata/properties" xmlns:ns2="71af3243-3dd4-4a8d-8c0d-dd76da1f02a5" xmlns:ns3="16c05727-aa75-4e4a-9b5f-8a80a1165891" targetNamespace="http://schemas.microsoft.com/office/2006/metadata/properties" ma:root="true" ma:fieldsID="60e05723c5c1908df1a1a4ebf11d344e" ns2:_="" ns3:_="">
     <xsd:import namespace="71af3243-3dd4-4a8d-8c0d-dd76da1f02a5"/>
@@ -28018,6 +28187,15 @@
 </ct:contentTypeSchema>
 </file>
 
+<file path=customXml/item2.xml><?xml version="1.0" encoding="utf-8"?>
+<?mso-contentType ?>
+<FormTemplates xmlns="http://schemas.microsoft.com/sharepoint/v3/contenttype/forms">
+  <Display>DocumentLibraryForm</Display>
+  <Edit>DocumentLibraryForm</Edit>
+  <New>DocumentLibraryForm</New>
+</FormTemplates>
+</file>
+
 <file path=customXml/item3.xml><?xml version="1.0" encoding="utf-8"?>
 <p:properties xmlns:p="http://schemas.microsoft.com/office/2006/metadata/properties" xmlns:xsi="http://www.w3.org/2001/XMLSchema-instance" xmlns:pc="http://schemas.microsoft.com/office/infopath/2007/PartnerControls">
   <documentManagement>
@@ -28027,14 +28205,6 @@
 </file>
 
 <file path=customXml/itemProps1.xml><?xml version="1.0" encoding="utf-8"?>
-<ds:datastoreItem xmlns:ds="http://schemas.openxmlformats.org/officeDocument/2006/customXml" ds:itemID="{4F44C90D-2A62-4985-9618-3460247437B1}">
-  <ds:schemaRefs>
-    <ds:schemaRef ds:uri="http://schemas.microsoft.com/sharepoint/v3/contenttype/forms"/>
-  </ds:schemaRefs>
-</ds:datastoreItem>
-</file>
-
-<file path=customXml/itemProps2.xml><?xml version="1.0" encoding="utf-8"?>
 <ds:datastoreItem xmlns:ds="http://schemas.openxmlformats.org/officeDocument/2006/customXml" ds:itemID="{B61EAB5F-88FC-4FAE-AE3C-037A3C365EB8}">
   <ds:schemaRefs>
     <ds:schemaRef ds:uri="http://schemas.microsoft.com/office/2006/metadata/contentType"/>
@@ -28049,6 +28219,14 @@
     <ds:schemaRef ds:uri="http://purl.org/dc/elements/1.1/"/>
     <ds:schemaRef ds:uri="http://purl.org/dc/terms/"/>
     <ds:schemaRef ds:uri="http://schemas.microsoft.com/internal/obd"/>
+  </ds:schemaRefs>
+</ds:datastoreItem>
+</file>
+
+<file path=customXml/itemProps2.xml><?xml version="1.0" encoding="utf-8"?>
+<ds:datastoreItem xmlns:ds="http://schemas.openxmlformats.org/officeDocument/2006/customXml" ds:itemID="{4F44C90D-2A62-4985-9618-3460247437B1}">
+  <ds:schemaRefs>
+    <ds:schemaRef ds:uri="http://schemas.microsoft.com/sharepoint/v3/contenttype/forms"/>
   </ds:schemaRefs>
 </ds:datastoreItem>
 </file>

--- a/Presentations/Ns-3_presentation_F.pptx
+++ b/Presentations/Ns-3_presentation_F.pptx
@@ -223,7 +223,7 @@
             <a:pPr rtl="0"/>
             <a:fld id="{F0EC7D35-77BB-4867-BAC6-5C40C37B98F1}" type="datetime1">
               <a:rPr lang="el-GR" smtClean="0"/>
-              <a:t>23/11/2025</a:t>
+              <a:t>9/12/2025</a:t>
             </a:fld>
             <a:endParaRPr lang="el-GR" dirty="0"/>
           </a:p>
@@ -393,7 +393,7 @@
             <a:pPr rtl="0"/>
             <a:fld id="{707ABAE7-72BE-4378-9C66-B300388DE536}" type="datetime1">
               <a:rPr lang="el-GR" noProof="0" smtClean="0"/>
-              <a:t>23/11/2025</a:t>
+              <a:t>9/12/2025</a:t>
             </a:fld>
             <a:endParaRPr lang="el-GR" noProof="0" dirty="0"/>
           </a:p>
@@ -9659,7 +9659,7 @@
             <a:pPr rtl="0"/>
             <a:fld id="{EABDBA74-E4DB-4313-95D3-B7F630EE7B7F}" type="datetime1">
               <a:rPr lang="el-GR" noProof="0" smtClean="0"/>
-              <a:t>23/11/2025</a:t>
+              <a:t>9/12/2025</a:t>
             </a:fld>
             <a:endParaRPr lang="el-GR" noProof="0" dirty="0"/>
           </a:p>
@@ -9868,7 +9868,7 @@
             <a:pPr rtl="0"/>
             <a:fld id="{D9C97E28-F60A-427B-851A-BCC048F06BC7}" type="datetime1">
               <a:rPr lang="el-GR" noProof="0" smtClean="0"/>
-              <a:t>23/11/2025</a:t>
+              <a:t>9/12/2025</a:t>
             </a:fld>
             <a:endParaRPr lang="el-GR" noProof="0" dirty="0"/>
           </a:p>
@@ -10050,7 +10050,7 @@
             <a:pPr rtl="0"/>
             <a:fld id="{4EA33EDB-81C3-4DAA-87EA-DA21D6A7FC6C}" type="datetime1">
               <a:rPr lang="el-GR" noProof="0" smtClean="0"/>
-              <a:t>23/11/2025</a:t>
+              <a:t>9/12/2025</a:t>
             </a:fld>
             <a:endParaRPr lang="el-GR" noProof="0" dirty="0"/>
           </a:p>
@@ -10257,7 +10257,7 @@
             <a:pPr rtl="0"/>
             <a:fld id="{0FE5ACA5-56F5-4208-8101-108DA68822C6}" type="datetime1">
               <a:rPr lang="el-GR" noProof="0" smtClean="0"/>
-              <a:t>23/11/2025</a:t>
+              <a:t>9/12/2025</a:t>
             </a:fld>
             <a:endParaRPr lang="el-GR" noProof="0" dirty="0"/>
           </a:p>
@@ -19171,7 +19171,7 @@
             <a:pPr rtl="0"/>
             <a:fld id="{98AAE694-814A-4F58-A8E2-AA9B6575E0B5}" type="datetime1">
               <a:rPr lang="el-GR" noProof="0" smtClean="0"/>
-              <a:t>23/11/2025</a:t>
+              <a:t>9/12/2025</a:t>
             </a:fld>
             <a:endParaRPr lang="el-GR" noProof="0" dirty="0"/>
           </a:p>
@@ -19447,7 +19447,7 @@
             <a:pPr rtl="0"/>
             <a:fld id="{98B30D4A-F623-45A5-BE49-543B4B609AF2}" type="datetime1">
               <a:rPr lang="el-GR" noProof="0" smtClean="0"/>
-              <a:t>23/11/2025</a:t>
+              <a:t>9/12/2025</a:t>
             </a:fld>
             <a:endParaRPr lang="el-GR" noProof="0" dirty="0"/>
           </a:p>
@@ -19847,7 +19847,7 @@
             <a:pPr rtl="0"/>
             <a:fld id="{06412F62-D18F-463A-9A7E-E4809AAD76E4}" type="datetime1">
               <a:rPr lang="el-GR" noProof="0" smtClean="0"/>
-              <a:t>23/11/2025</a:t>
+              <a:t>9/12/2025</a:t>
             </a:fld>
             <a:endParaRPr lang="el-GR" noProof="0" dirty="0"/>
           </a:p>
@@ -19967,7 +19967,7 @@
             <a:pPr rtl="0"/>
             <a:fld id="{D2009D47-CF8A-48CB-81B8-5988DBFADA28}" type="datetime1">
               <a:rPr lang="el-GR" noProof="0" smtClean="0"/>
-              <a:t>23/11/2025</a:t>
+              <a:t>9/12/2025</a:t>
             </a:fld>
             <a:endParaRPr lang="el-GR" noProof="0" dirty="0"/>
           </a:p>
@@ -20063,7 +20063,7 @@
             <a:pPr rtl="0"/>
             <a:fld id="{89B075A6-4B0E-489A-92E5-C2C81D969D11}" type="datetime1">
               <a:rPr lang="el-GR" noProof="0" smtClean="0"/>
-              <a:t>23/11/2025</a:t>
+              <a:t>9/12/2025</a:t>
             </a:fld>
             <a:endParaRPr lang="el-GR" noProof="0" dirty="0"/>
           </a:p>
@@ -20355,7 +20355,7 @@
             <a:pPr rtl="0"/>
             <a:fld id="{7C290451-C354-46E0-BBD8-0317D7A1384C}" type="datetime1">
               <a:rPr lang="el-GR" noProof="0" smtClean="0"/>
-              <a:t>23/11/2025</a:t>
+              <a:t>9/12/2025</a:t>
             </a:fld>
             <a:endParaRPr lang="el-GR" noProof="0" dirty="0"/>
           </a:p>
@@ -20637,7 +20637,7 @@
             <a:pPr rtl="0"/>
             <a:fld id="{05DAA40D-D363-46A0-9276-B6A4797DC9A5}" type="datetime1">
               <a:rPr lang="el-GR" noProof="0" smtClean="0"/>
-              <a:t>23/11/2025</a:t>
+              <a:t>9/12/2025</a:t>
             </a:fld>
             <a:endParaRPr lang="el-GR" noProof="0" dirty="0"/>
           </a:p>
@@ -20886,7 +20886,7 @@
           <a:p>
             <a:fld id="{F98FDC76-A1F5-4EE8-BDE3-5EFC56AAE7AD}" type="datetime1">
               <a:rPr lang="el-GR" noProof="0" smtClean="0"/>
-              <a:t>23/11/2025</a:t>
+              <a:t>9/12/2025</a:t>
             </a:fld>
             <a:endParaRPr lang="el-GR" noProof="0" dirty="0"/>
           </a:p>
@@ -22850,7 +22850,7 @@
         </p:blipFill>
         <p:spPr>
           <a:xfrm>
-            <a:off x="868900" y="2200203"/>
+            <a:off x="7448994" y="2181667"/>
             <a:ext cx="4193399" cy="4519100"/>
           </a:xfrm>
           <a:prstGeom prst="rect">
@@ -22880,7 +22880,7 @@
         </p:blipFill>
         <p:spPr>
           <a:xfrm>
-            <a:off x="7597693" y="2195114"/>
+            <a:off x="1003714" y="2195114"/>
             <a:ext cx="4193399" cy="4524189"/>
           </a:xfrm>
           <a:prstGeom prst="rect">
@@ -26735,7 +26735,7 @@
                 <a:ea typeface="Calibri" panose="020F0502020204030204" pitchFamily="34" charset="0"/>
                 <a:cs typeface="Calibri" panose="020F0502020204030204" pitchFamily="34" charset="0"/>
               </a:rPr>
-              <a:t>παρέχει τα βασικά επίπεδα πρωτοκόλλων δικτύου που επιτρέπουν την επικοινωνία μεταξύ των κόμβων και λειτουργεί ως σύστημα λογισμικού που υποστηρίζει την αποστολή, λήψη και επεξεργασία πακέτων.</a:t>
+              <a:t>παρέχει τα βασικά επίπεδα πρωτοκόλλων δικτύου που επιτρέπουν την επικοινωνία μεταξύ των κόμβων και λειτουργεί ως λογισμικό που υποστηρίζει την αποστολή, λήψη και επεξεργασία πακέτων.</a:t>
             </a:r>
             <a:endParaRPr lang="en-US" altLang="el-GR" sz="1700" dirty="0">
               <a:latin typeface="Calibri" panose="020F0502020204030204" pitchFamily="34" charset="0"/>
@@ -28234,16 +28234,16 @@
 <file path=customXml/itemProps3.xml><?xml version="1.0" encoding="utf-8"?>
 <ds:datastoreItem xmlns:ds="http://schemas.openxmlformats.org/officeDocument/2006/customXml" ds:itemID="{788A2F88-55C5-4ED1-9541-807C65424763}">
   <ds:schemaRefs>
-    <ds:schemaRef ds:uri="http://schemas.microsoft.com/office/2006/documentManagement/types"/>
-    <ds:schemaRef ds:uri="http://schemas.microsoft.com/office/2006/metadata/properties"/>
-    <ds:schemaRef ds:uri="http://purl.org/dc/elements/1.1/"/>
-    <ds:schemaRef ds:uri="http://www.w3.org/XML/1998/namespace"/>
+    <ds:schemaRef ds:uri="http://purl.org/dc/terms/"/>
     <ds:schemaRef ds:uri="16c05727-aa75-4e4a-9b5f-8a80a1165891"/>
     <ds:schemaRef ds:uri="http://purl.org/dc/dcmitype/"/>
+    <ds:schemaRef ds:uri="http://schemas.microsoft.com/office/2006/documentManagement/types"/>
     <ds:schemaRef ds:uri="71af3243-3dd4-4a8d-8c0d-dd76da1f02a5"/>
+    <ds:schemaRef ds:uri="http://schemas.openxmlformats.org/package/2006/metadata/core-properties"/>
+    <ds:schemaRef ds:uri="http://schemas.microsoft.com/office/2006/metadata/properties"/>
     <ds:schemaRef ds:uri="http://schemas.microsoft.com/office/infopath/2007/PartnerControls"/>
-    <ds:schemaRef ds:uri="http://schemas.openxmlformats.org/package/2006/metadata/core-properties"/>
-    <ds:schemaRef ds:uri="http://purl.org/dc/terms/"/>
+    <ds:schemaRef ds:uri="http://www.w3.org/XML/1998/namespace"/>
+    <ds:schemaRef ds:uri="http://purl.org/dc/elements/1.1/"/>
   </ds:schemaRefs>
 </ds:datastoreItem>
 </file>